--- a/assets/pptx/catalog-712.pptx
+++ b/assets/pptx/catalog-712.pptx
@@ -3441,7 +3441,7 @@
                 <a:ea typeface="Ebrima"/>
                 <a:cs typeface="Ebrima"/>
               </a:rPr>
-              <a:t>ኡ መሳይ የለህ (2x)</a:t>
+              <a:t>ኡ መሳይ የለህ 2x</a:t>
             </a:r>
           </a:p>
         </p:txBody>
@@ -3544,7 +3544,7 @@
                 <a:ea typeface="Ebrima"/>
                 <a:cs typeface="Ebrima"/>
               </a:rPr>
-              <a:t>አመልካለሁኝ (2x)</a:t>
+              <a:t>አመልካለሁኝ 2x</a:t>
             </a:r>
           </a:p>
         </p:txBody>
@@ -3629,7 +3629,7 @@
                 <a:ea typeface="Ebrima"/>
                 <a:cs typeface="Ebrima"/>
               </a:rPr>
-              <a:t>አለሁኝ እኔም . (1) .</a:t>
+              <a:t>አለሁኝ እኔም . 1 .</a:t>
             </a:r>
           </a:p>
           <a:p>
@@ -3647,7 +3647,7 @@
                 <a:ea typeface="Ebrima"/>
                 <a:cs typeface="Ebrima"/>
               </a:rPr>
-              <a:t>አመልካለሁ እኔ (2x)</a:t>
+              <a:t>አመልካለሁ እኔ 2x</a:t>
             </a:r>
           </a:p>
         </p:txBody>
@@ -3768,7 +3768,7 @@
                 <a:ea typeface="Ebrima"/>
                 <a:cs typeface="Ebrima"/>
               </a:rPr>
-              <a:t>በዚያ ለመኖር አትታ. (2) .</a:t>
+              <a:t>በዚያ ለመኖር አትታ. 2 .</a:t>
             </a:r>
           </a:p>
         </p:txBody>
@@ -3889,7 +3889,7 @@
                 <a:ea typeface="Ebrima"/>
                 <a:cs typeface="Ebrima"/>
               </a:rPr>
-              <a:t>ተወዳዳሪ መሳይ የለህ (2x)</a:t>
+              <a:t>ተወዳዳሪ መሳይ የለህ 2x</a:t>
             </a:r>
           </a:p>
         </p:txBody>
@@ -3992,7 +3992,7 @@
                 <a:ea typeface="Ebrima"/>
                 <a:cs typeface="Ebrima"/>
               </a:rPr>
-              <a:t>. (3) . እግዚአብሔር (2x)</a:t>
+              <a:t>. 3 . እግዚአብሔር 2x</a:t>
             </a:r>
           </a:p>
         </p:txBody>
@@ -4095,7 +4095,7 @@
                 <a:ea typeface="Ebrima"/>
                 <a:cs typeface="Ebrima"/>
               </a:rPr>
-              <a:t>ላምልክህ እንደገና (2x)</a:t>
+              <a:t>ላምልክህ እንደገና 2x</a:t>
             </a:r>
           </a:p>
         </p:txBody>
